--- a/1차프로젝트/기획서_신혜린.pptx
+++ b/1차프로젝트/기획서_신혜린.pptx
@@ -122,7 +122,7 @@
   <pc:docChgLst>
     <pc:chgData name="혜린 신" userId="5adea4bc7da63cbc" providerId="LiveId" clId="{006129DB-ED47-489C-BE29-1CD45A3BB9BA}"/>
     <pc:docChg chg="undo custSel addSld delSld modSld">
-      <pc:chgData name="혜린 신" userId="5adea4bc7da63cbc" providerId="LiveId" clId="{006129DB-ED47-489C-BE29-1CD45A3BB9BA}" dt="2026-03-19T02:28:06.871" v="1642" actId="20577"/>
+      <pc:chgData name="혜린 신" userId="5adea4bc7da63cbc" providerId="LiveId" clId="{006129DB-ED47-489C-BE29-1CD45A3BB9BA}" dt="2026-03-19T02:35:36.590" v="1643" actId="20577"/>
       <pc:docMkLst>
         <pc:docMk/>
       </pc:docMkLst>
@@ -150,7 +150,7 @@
         </pc:spChg>
       </pc:sldChg>
       <pc:sldChg chg="modSp mod">
-        <pc:chgData name="혜린 신" userId="5adea4bc7da63cbc" providerId="LiveId" clId="{006129DB-ED47-489C-BE29-1CD45A3BB9BA}" dt="2026-03-19T02:26:19.742" v="1622" actId="1076"/>
+        <pc:chgData name="혜린 신" userId="5adea4bc7da63cbc" providerId="LiveId" clId="{006129DB-ED47-489C-BE29-1CD45A3BB9BA}" dt="2026-03-19T02:35:36.590" v="1643" actId="20577"/>
         <pc:sldMkLst>
           <pc:docMk/>
           <pc:sldMk cId="2724097635" sldId="257"/>
@@ -164,7 +164,7 @@
           </ac:spMkLst>
         </pc:spChg>
         <pc:spChg chg="mod">
-          <ac:chgData name="혜린 신" userId="5adea4bc7da63cbc" providerId="LiveId" clId="{006129DB-ED47-489C-BE29-1CD45A3BB9BA}" dt="2026-03-19T02:26:19.742" v="1622" actId="1076"/>
+          <ac:chgData name="혜린 신" userId="5adea4bc7da63cbc" providerId="LiveId" clId="{006129DB-ED47-489C-BE29-1CD45A3BB9BA}" dt="2026-03-19T02:35:36.590" v="1643" actId="20577"/>
           <ac:spMkLst>
             <pc:docMk/>
             <pc:sldMk cId="2724097635" sldId="257"/>
@@ -3958,6 +3958,12 @@
               </a:rPr>
               <a:t>중성지방 및 나쁜 콜레스테롤 증가</a:t>
             </a:r>
+            <a:endParaRPr lang="en-US" altLang="ko-KR">
+              <a:latin typeface="Noto Sans KR" panose="020B0200000000000000" pitchFamily="50" charset="-127"/>
+              <a:ea typeface="Noto Sans KR" panose="020B0200000000000000" pitchFamily="50" charset="-127"/>
+            </a:endParaRPr>
+          </a:p>
+          <a:p>
             <a:endParaRPr lang="en-US" altLang="ko-KR" dirty="0">
               <a:latin typeface="Noto Sans KR" panose="020B0200000000000000" pitchFamily="50" charset="-127"/>
               <a:ea typeface="Noto Sans KR" panose="020B0200000000000000" pitchFamily="50" charset="-127"/>
